--- a/assets/presentation/03 - Pipeline and Initial Experiments.pptx
+++ b/assets/presentation/03 - Pipeline and Initial Experiments.pptx
@@ -34105,7 +34105,7 @@
               <a:rPr lang="de-DE" dirty="0">
                 <a:latin typeface="+mn-lt"/>
               </a:rPr>
-              <a:t>Different </a:t>
+              <a:t>Use different </a:t>
             </a:r>
             <a:r>
               <a:rPr lang="de-DE" dirty="0" err="1">
